--- a/docs/AI-KOL-Executive-Review.pptx
+++ b/docs/AI-KOL-Executive-Review.pptx
@@ -3301,7 +3301,7 @@
                 </a:solidFill>
                 <a:latin typeface="Segoe UI"/>
               </a:rPr>
-              <a:t>Prepared by the intern team  ·  2026-07-31  ·  100% local stack, zero software licence cost</a:t>
+              <a:t>Prepared by the intern team  ·  2026-08-03  ·  100% local stack, zero software licence cost</a:t>
             </a:r>
           </a:p>
         </p:txBody>
@@ -4291,7 +4291,7 @@
                 </a:solidFill>
                 <a:latin typeface="Segoe UI"/>
               </a:rPr>
-              <a:t>The avatar is not the KOL's face</a:t>
+              <a:t>The AI must stay human-reviewed before it talks to real followers</a:t>
             </a:r>
           </a:p>
         </p:txBody>
@@ -4330,7 +4330,7 @@
                 </a:solidFill>
                 <a:latin typeface="Segoe UI"/>
               </a:rPr>
-              <a:t>Highest priority. Uses a stock demo face today. Requires generating a short video from a portrait before an avatar can be built.</a:t>
+              <a:t>Tested against the rules we set it, a 7B model still denied being AI, invented a price, and offered to negotiate a deal. Code-level guards now block all of that, but keep replies in approve-before-send mode.</a:t>
             </a:r>
           </a:p>
         </p:txBody>
@@ -4396,7 +4396,7 @@
             <a:avLst/>
           </a:prstGeom>
           <a:solidFill>
-            <a:srgbClr val="A86400"/>
+            <a:srgbClr val="C62B2B"/>
           </a:solidFill>
           <a:ln>
             <a:noFill/>
@@ -4459,7 +4459,7 @@
                 </a:solidFill>
                 <a:latin typeface="Segoe UI"/>
               </a:rPr>
-              <a:t>Only one KOL has a voice</a:t>
+              <a:t>Licence: the lip-sync tool requires its watermark on published video</a:t>
             </a:r>
           </a:p>
         </p:txBody>
@@ -4498,7 +4498,7 @@
                 </a:solidFill>
                 <a:latin typeface="Segoe UI"/>
               </a:rPr>
-              <a:t>9 of 10 personas are still silent. The pipeline is proven, so this is now routine work rather than research.</a:t>
+              <a:t>A management decision, not a technical one: accept the watermark, license the commercial edition, or change engine. The lip-sync model's own weights are also research-licensed. Needs legal review before launch.</a:t>
             </a:r>
           </a:p>
         </p:txBody>
@@ -4627,7 +4627,7 @@
                 </a:solidFill>
                 <a:latin typeface="Segoe UI"/>
               </a:rPr>
-              <a:t>The avatar cannot think yet</a:t>
+              <a:t>Her head does not move naturally yet</a:t>
             </a:r>
           </a:p>
         </p:txBody>
@@ -4666,7 +4666,7 @@
                 </a:solidFill>
                 <a:latin typeface="Segoe UI"/>
               </a:rPr>
-              <a:t>It repeats what it is given. Connecting a local language model would let it answer comments in character.</a:t>
+              <a:t>Motion is a camera drift over one photo — she does not blink or turn. Real facial motion needs an image-to-video model, which cannot share the GPU with the services.</a:t>
             </a:r>
           </a:p>
         </p:txBody>
@@ -4795,7 +4795,7 @@
                 </a:solidFill>
                 <a:latin typeface="Segoe UI"/>
               </a:rPr>
-              <a:t>Multi-speaker audio is unsafe</a:t>
+              <a:t>Only one of ten KOLs is fully built</a:t>
             </a:r>
           </a:p>
         </p:txBody>
@@ -4834,7 +4834,7 @@
                 </a:solidFill>
                 <a:latin typeface="Segoe UI"/>
               </a:rPr>
-              <a:t>If we crawl a two-person podcast, the voices blend. Only single-speaker sources should be used until speaker separation is added.</a:t>
+              <a:t>The pipeline is proven and largely unattended now, so the rest is routine work rather than research — roughly a day each including review.</a:t>
             </a:r>
           </a:p>
         </p:txBody>
@@ -4963,7 +4963,7 @@
                 </a:solidFill>
                 <a:latin typeface="Segoe UI"/>
               </a:rPr>
-              <a:t>Face consistency across images</a:t>
+              <a:t>Face consistency across still images</a:t>
             </a:r>
           </a:p>
         </p:txBody>
@@ -5002,7 +5002,7 @@
                 </a:solidFill>
                 <a:latin typeface="Segoe UI"/>
               </a:rPr>
-              <a:t>Generated images do not yet hold a stable identity — needed before publishing photo content at volume.</a:t>
+              <a:t>Generated photos do not hold a stable identity yet — needed before publishing photo content at volume.</a:t>
             </a:r>
           </a:p>
         </p:txBody>
@@ -5131,7 +5131,7 @@
                 </a:solidFill>
                 <a:latin typeface="Segoe UI"/>
               </a:rPr>
-              <a:t>Interruption handling is unreliable</a:t>
+              <a:t>Multi-speaker audio, and live interruption</a:t>
             </a:r>
           </a:p>
         </p:txBody>
@@ -5170,7 +5170,7 @@
                 </a:solidFill>
                 <a:latin typeface="Segoe UI"/>
               </a:rPr>
-              <a:t>Cutting the avatar off mid-sentence is flaky upstream. Avoid designing live formats that depend on it.</a:t>
+              <a:t>Crawling a two-host podcast would blend voices (use single-speaker sources), and cutting her off mid-sentence is unreliable upstream.</a:t>
             </a:r>
           </a:p>
         </p:txBody>
@@ -5266,7 +5266,7 @@
                 </a:solidFill>
                 <a:latin typeface="Segoe UI"/>
               </a:rPr>
-              <a:t>Plan for 4 hours/day (week of 2026-08-03)</a:t>
+              <a:t>Plan for 4 hours/day (week of 2026-08-10)</a:t>
             </a:r>
           </a:p>
         </p:txBody>
@@ -5443,7 +5443,7 @@
                           <a:latin typeface="Segoe UI"/>
                         </a:rPr>
                         <a:t>Mon
-08/03</a:t>
+08/10</a:t>
                       </a:r>
                     </a:p>
                   </a:txBody>
@@ -5465,7 +5465,7 @@
                           </a:solidFill>
                           <a:latin typeface="Segoe UI"/>
                         </a:rPr>
-                        <a:t>Set up image-to-video generation</a:t>
+                        <a:t>Natural head motion (LivePortrait)</a:t>
                       </a:r>
                     </a:p>
                   </a:txBody>
@@ -5487,7 +5487,7 @@
                           </a:solidFill>
                           <a:latin typeface="Segoe UI"/>
                         </a:rPr>
-                        <a:t>Tool installed, first test clip rendered from a portrait</a:t>
+                        <a:t>She blinks and turns her head instead of a camera drift</a:t>
                       </a:r>
                     </a:p>
                   </a:txBody>
@@ -5509,7 +5509,7 @@
                           </a:solidFill>
                           <a:latin typeface="Segoe UI"/>
                         </a:rPr>
-                        <a:t>Large download</a:t>
+                        <a:t>Model download</a:t>
                       </a:r>
                     </a:p>
                   </a:txBody>
@@ -5534,7 +5534,7 @@
                           <a:latin typeface="Segoe UI"/>
                         </a:rPr>
                         <a:t>Tue
-08/04</a:t>
+08/11</a:t>
                       </a:r>
                     </a:p>
                   </a:txBody>
@@ -5556,7 +5556,7 @@
                           </a:solidFill>
                           <a:latin typeface="Segoe UI"/>
                         </a:rPr>
-                        <a:t>Generate the KOL's idle-motion clip</a:t>
+                        <a:t>Second KOL end-to-end</a:t>
                       </a:r>
                     </a:p>
                   </a:txBody>
@@ -5578,7 +5578,7 @@
                           </a:solidFill>
                           <a:latin typeface="Segoe UI"/>
                         </a:rPr>
-                        <a:t>A 20–30 s usable clip of Lena's face</a:t>
+                        <a:t>A second character with her own face + voice, timed for estimating</a:t>
                       </a:r>
                     </a:p>
                   </a:txBody>
@@ -5596,11 +5596,11 @@
                       <a:r>
                         <a:rPr sz="1050" b="0">
                           <a:solidFill>
-                            <a:srgbClr val="A86400"/>
-                          </a:solidFill>
-                          <a:latin typeface="Segoe UI"/>
-                        </a:rPr>
-                        <a:t>Quality iteration</a:t>
+                            <a:srgbClr val="0F8A4C"/>
+                          </a:solidFill>
+                          <a:latin typeface="Segoe UI"/>
+                        </a:rPr>
+                        <a:t>Low</a:t>
                       </a:r>
                     </a:p>
                   </a:txBody>
@@ -5625,7 +5625,7 @@
                           <a:latin typeface="Segoe UI"/>
                         </a:rPr>
                         <a:t>Wed
-08/05</a:t>
+08/12</a:t>
                       </a:r>
                     </a:p>
                   </a:txBody>
@@ -5647,7 +5647,7 @@
                           </a:solidFill>
                           <a:latin typeface="Segoe UI"/>
                         </a:rPr>
-                        <a:t>Build + test the custom avatar</a:t>
+                        <a:t>Approve-before-send reply queue</a:t>
                       </a:r>
                     </a:p>
                   </a:txBody>
@@ -5669,7 +5669,7 @@
                           </a:solidFill>
                           <a:latin typeface="Segoe UI"/>
                         </a:rPr>
-                        <a:t>Avatar speaking with Lena's face AND voice — the milestone</a:t>
+                        <a:t>Draft replies queued for human approval, not auto-sent</a:t>
                       </a:r>
                     </a:p>
                   </a:txBody>
@@ -5716,7 +5716,7 @@
                           <a:latin typeface="Segoe UI"/>
                         </a:rPr>
                         <a:t>Thu
-08/06</a:t>
+08/13</a:t>
                       </a:r>
                     </a:p>
                   </a:txBody>
@@ -5738,7 +5738,7 @@
                           </a:solidFill>
                           <a:latin typeface="Segoe UI"/>
                         </a:rPr>
-                        <a:t>Connect the language model</a:t>
+                        <a:t>Stream to OBS + record a demo reel</a:t>
                       </a:r>
                     </a:p>
                   </a:txBody>
@@ -5760,7 +5760,7 @@
                           </a:solidFill>
                           <a:latin typeface="Segoe UI"/>
                         </a:rPr>
-                        <a:t>Avatar answers a question in persona instead of repeating</a:t>
+                        <a:t>Shareable demo video; output usable in a real broadcast</a:t>
                       </a:r>
                     </a:p>
                   </a:txBody>
@@ -5778,11 +5778,11 @@
                       <a:r>
                         <a:rPr sz="1050" b="0">
                           <a:solidFill>
-                            <a:srgbClr val="0F8A4C"/>
-                          </a:solidFill>
-                          <a:latin typeface="Segoe UI"/>
-                        </a:rPr>
-                        <a:t>Low</a:t>
+                            <a:srgbClr val="A86400"/>
+                          </a:solidFill>
+                          <a:latin typeface="Segoe UI"/>
+                        </a:rPr>
+                        <a:t>Medium</a:t>
                       </a:r>
                     </a:p>
                   </a:txBody>
@@ -5807,7 +5807,7 @@
                           <a:latin typeface="Segoe UI"/>
                         </a:rPr>
                         <a:t>Fri
-08/07</a:t>
+08/14</a:t>
                       </a:r>
                     </a:p>
                   </a:txBody>
@@ -5829,7 +5829,7 @@
                           </a:solidFill>
                           <a:latin typeface="Segoe UI"/>
                         </a:rPr>
-                        <a:t>Buffer · demo · write-up</a:t>
+                        <a:t>Buffer · docs · write-up</a:t>
                       </a:r>
                     </a:p>
                   </a:txBody>
@@ -5851,7 +5851,7 @@
                           </a:solidFill>
                           <a:latin typeface="Segoe UI"/>
                         </a:rPr>
-                        <a:t>Recorded demo video + updated docs</a:t>
+                        <a:t>Updated docs + decision memo on the licence question</a:t>
                       </a:r>
                     </a:p>
                   </a:txBody>
@@ -5922,7 +5922,7 @@
                 </a:solidFill>
                 <a:latin typeface="Segoe UI"/>
               </a:rPr>
-              <a:t>Total 20 hours. Friday is deliberately kept as buffer: this project has shown that setup problems, not the actual work, are what consume time. If Monday and Tuesday run clean, Friday moves forward to voicing a second KOL.</a:t>
+              <a:t>Total 20 hours. Friday is deliberately kept as buffer: this project has repeatedly shown that setup problems, not the actual work, consume the time. If the week runs clean, Friday moves forward to a third KOL.</a:t>
             </a:r>
           </a:p>
           <a:p>
@@ -5954,7 +5954,7 @@
                 </a:solidFill>
                 <a:latin typeface="Segoe UI"/>
               </a:rPr>
-              <a:t>Milestone to judge the week by: Wednesday — an avatar with both the KOL's face and her voice, which is the first genuinely presentable output.</a:t>
+              <a:t>The one thing I need a decision on, not more work: whether to accept the lip-sync tool's watermark condition, pay for its commercial edition, or switch engine. That choice affects everything published afterwards, so it is cheaper to settle now.</a:t>
             </a:r>
           </a:p>
         </p:txBody>
@@ -7311,7 +7311,7 @@
                 </a:solidFill>
                 <a:latin typeface="Segoe UI"/>
               </a:rPr>
-              <a:t>A KOL that speaks with her own voice — working today</a:t>
+              <a:t>A KOL with her own face, own voice, and her own answers</a:t>
             </a:r>
           </a:p>
         </p:txBody>
@@ -7440,7 +7440,7 @@
                 </a:solidFill>
                 <a:latin typeface="Segoe UI"/>
               </a:rPr>
-              <a:t>2 of 4</a:t>
+              <a:t>4 of 4</a:t>
             </a:r>
           </a:p>
         </p:txBody>
@@ -7479,7 +7479,7 @@
                 </a:solidFill>
                 <a:latin typeface="Segoe UI"/>
               </a:rPr>
-              <a:t>pipeline layers complete</a:t>
+              <a:t>pipeline layers now working</a:t>
             </a:r>
           </a:p>
         </p:txBody>
@@ -7603,7 +7603,7 @@
                 </a:solidFill>
                 <a:latin typeface="Segoe UI"/>
               </a:rPr>
-              <a:t>voice built &amp; verified</a:t>
+              <a:t>avatar: own face + own voice</a:t>
             </a:r>
           </a:p>
         </p:txBody>
@@ -7899,7 +7899,7 @@
                 </a:solidFill>
                 <a:latin typeface="Segoe UI"/>
               </a:rPr>
-              <a:t>What works now: </a:t>
+              <a:t>A follower can ask a question and she answers it herself, out loud, on camera. </a:t>
             </a:r>
             <a:r>
               <a:rPr sz="1300">
@@ -7908,7 +7908,7 @@
                 </a:solidFill>
                 <a:latin typeface="Segoe UI"/>
               </a:rPr>
-              <a:t>type any sentence and a talking avatar speaks it in a purpose-built voice, in Chinese and English, in real time (0.7 s to first audio).</a:t>
+              <a:t>Her own face, her own cloned voice, an answer written in her own persona — generated locally in about two seconds.</a:t>
             </a:r>
           </a:p>
         </p:txBody>
@@ -7956,7 +7956,7 @@
                 </a:solidFill>
                 <a:latin typeface="Segoe UI"/>
               </a:rPr>
-              <a:t>Built entirely on open-source models running locally. </a:t>
+              <a:t>Built entirely on open-source models running on one PC. </a:t>
             </a:r>
             <a:r>
               <a:rPr sz="1300">
@@ -8013,7 +8013,7 @@
                 </a:solidFill>
                 <a:latin typeface="Segoe UI"/>
               </a:rPr>
-              <a:t>The voice is legally clean by design. </a:t>
+              <a:t>Legally clean by design on the voice. </a:t>
             </a:r>
             <a:r>
               <a:rPr sz="1300">
@@ -8022,7 +8022,7 @@
                 </a:solidFill>
                 <a:latin typeface="Segoe UI"/>
               </a:rPr>
-              <a:t>It is synthesized, then fine-tuned — it never belonged to a real person, so there is no likeness or consent exposure.</a:t>
+              <a:t>It is synthesized then fine-tuned — it never belonged to a real person, so there is no likeness or consent exposure.</a:t>
             </a:r>
           </a:p>
         </p:txBody>
@@ -8070,7 +8070,7 @@
                 </a:solidFill>
                 <a:latin typeface="Segoe UI"/>
               </a:rPr>
-              <a:t>Remaining gap is the face, not the voice. </a:t>
+              <a:t>Two items need a management decision, not more engineering: </a:t>
             </a:r>
             <a:r>
               <a:rPr sz="1300">
@@ -8079,7 +8079,7 @@
                 </a:solidFill>
                 <a:latin typeface="Segoe UI"/>
               </a:rPr>
-              <a:t>The avatar currently uses a stock demo face; giving it the KOL's own face is next week's priority.</a:t>
+              <a:t>the lip-sync tool's licence requires its watermark on published video, and the AI must stay human-reviewed before it replies to real followers.</a:t>
             </a:r>
           </a:p>
         </p:txBody>
@@ -10067,11 +10067,11 @@
             <a:r>
               <a:rPr sz="950" b="1" i="0">
                 <a:solidFill>
-                  <a:srgbClr val="A86400"/>
+                  <a:srgbClr val="0F8A4C"/>
                 </a:solidFill>
                 <a:latin typeface="Segoe UI"/>
               </a:rPr>
-              <a:t>IN PROGRESS</a:t>
+              <a:t>COMPLETE</a:t>
             </a:r>
           </a:p>
         </p:txBody>
@@ -10110,7 +10110,7 @@
                 </a:solidFill>
                 <a:latin typeface="Segoe UI"/>
               </a:rPr>
-              <a:t>Lip-synced talking avatar,</a:t>
+              <a:t>Lip-synced talking avatar</a:t>
             </a:r>
           </a:p>
           <a:p>
@@ -10126,7 +10126,7 @@
                 </a:solidFill>
                 <a:latin typeface="Segoe UI"/>
               </a:rPr>
-              <a:t>streamable to OBS</a:t>
+              <a:t>+ persona brain (local LLM)</a:t>
             </a:r>
           </a:p>
         </p:txBody>
@@ -10161,11 +10161,11 @@
             <a:r>
               <a:rPr sz="1050" b="1" i="0">
                 <a:solidFill>
-                  <a:srgbClr val="A86400"/>
+                  <a:srgbClr val="0F8A4C"/>
                 </a:solidFill>
                 <a:latin typeface="Segoe UI"/>
               </a:rPr>
-              <a:t>stock face only</a:t>
+              <a:t>own face, own voice</a:t>
             </a:r>
           </a:p>
         </p:txBody>
